--- a/tests/quality/fixtures/portability/templates/portability-side-logo.pptx
+++ b/tests/quality/fixtures/portability/templates/portability-side-logo.pptx
@@ -356,7 +356,7 @@
         <p:spPr>
           <a:xfrm>
             <a:off x="838200" y="1825625"/>
-            <a:ext cx="5181600" cy="4351338"/>
+            <a:ext cx="5120640" cy="4351338"/>
           </a:xfrm>
         </p:spPr>
         <p:txBody>
@@ -390,8 +390,8 @@
         </p:nvSpPr>
         <p:spPr>
           <a:xfrm>
-            <a:off x="6172200" y="1825625"/>
-            <a:ext cx="5181600" cy="4351338"/>
+            <a:off x="6233160" y="1825625"/>
+            <a:ext cx="5120640" cy="4351338"/>
           </a:xfrm>
         </p:spPr>
         <p:txBody>

--- a/tests/quality/fixtures/portability/templates/portability-side-logo.pptx
+++ b/tests/quality/fixtures/portability/templates/portability-side-logo.pptx
@@ -966,30 +966,6 @@
           </a:p>
         </p:txBody>
       </p:sp>
-      <p:pic>
-        <p:nvPicPr>
-          <p:cNvPr id="20" name="Logo" descr="Company logo"/>
-          <p:cNvPicPr>
-            <a:picLocks noChangeAspect="1"/>
-          </p:cNvPicPr>
-          <p:nvPr userDrawn="1"/>
-        </p:nvPicPr>
-        <p:blipFill>
-          <a:blip r:embed="rId20"/>
-          <a:stretch>
-            <a:fillRect/>
-          </a:stretch>
-        </p:blipFill>
-        <p:spPr>
-          <a:xfrm>
-            <a:off x="11430000" y="4572000"/>
-            <a:ext cx="640080" cy="1600200"/>
-          </a:xfrm>
-          <a:prstGeom prst="rect">
-            <a:avLst/>
-          </a:prstGeom>
-        </p:spPr>
-      </p:pic>
     </p:spTree>
   </p:cSld>
   <p:clrMap bg1="lt1" tx1="dk1" bg2="lt2" tx2="dk2" accent1="accent1" accent2="accent2" accent3="accent3" accent4="accent4" accent5="accent5" accent6="accent6" hlink="hlink" folHlink="folHlink"/>

--- a/tests/quality/fixtures/portability/templates/portability-side-logo.pptx
+++ b/tests/quality/fixtures/portability/templates/portability-side-logo.pptx
@@ -546,8 +546,8 @@
         </p:nvSpPr>
         <p:spPr>
           <a:xfrm>
-            <a:off x="1485900" y="685800"/>
-            <a:ext cx="9486900" cy="1851025"/>
+            <a:off x="1524000" y="1122363"/>
+            <a:ext cx="9144000" cy="2387600"/>
           </a:xfrm>
         </p:spPr>
         <p:txBody>
@@ -580,8 +580,8 @@
         </p:nvSpPr>
         <p:spPr>
           <a:xfrm>
-            <a:off x="1485900" y="2667000"/>
-            <a:ext cx="9486900" cy="1371600"/>
+            <a:off x="1524000" y="3602038"/>
+            <a:ext cx="9144000" cy="1655762"/>
           </a:xfrm>
         </p:spPr>
         <p:txBody>
